--- a/AI적용_과제요약서_AI활용가이드포털.pptx
+++ b/AI적용_과제요약서_AI활용가이드포털.pptx
@@ -1531,8 +1531,8 @@
         </p:nvSpPr>
         <p:spPr>
           <a:xfrm>
-            <a:off x="1499616" y="2386584"/>
-            <a:ext cx="3127248" cy="292608"/>
+            <a:off x="1609344" y="2386584"/>
+            <a:ext cx="3017520" cy="292608"/>
           </a:xfrm>
           <a:prstGeom prst="rect">
             <a:avLst/>
@@ -1659,8 +1659,8 @@
         </p:nvSpPr>
         <p:spPr>
           <a:xfrm>
-            <a:off x="5815584" y="2386584"/>
-            <a:ext cx="2944368" cy="292608"/>
+            <a:off x="5925312" y="2386584"/>
+            <a:ext cx="2834640" cy="292608"/>
           </a:xfrm>
           <a:prstGeom prst="rect">
             <a:avLst/>
@@ -1853,8 +1853,8 @@
         </p:nvSpPr>
         <p:spPr>
           <a:xfrm>
-            <a:off x="438912" y="3296412"/>
-            <a:ext cx="50292" cy="141732"/>
+            <a:off x="448056" y="3296412"/>
+            <a:ext cx="45720" cy="141732"/>
           </a:xfrm>
           <a:prstGeom prst="rect">
             <a:avLst/>
@@ -1878,8 +1878,8 @@
         </p:nvSpPr>
         <p:spPr>
           <a:xfrm>
-            <a:off x="548640" y="3264408"/>
-            <a:ext cx="3794760" cy="210312"/>
+            <a:off x="566928" y="3264408"/>
+            <a:ext cx="3776472" cy="210312"/>
           </a:xfrm>
           <a:prstGeom prst="rect">
             <a:avLst/>
@@ -1917,8 +1917,8 @@
         </p:nvSpPr>
         <p:spPr>
           <a:xfrm>
-            <a:off x="548640" y="3502152"/>
-            <a:ext cx="3739896" cy="896112"/>
+            <a:off x="530352" y="3502152"/>
+            <a:ext cx="3685032" cy="896112"/>
           </a:xfrm>
           <a:prstGeom prst="rect">
             <a:avLst/>
@@ -2011,8 +2011,8 @@
         </p:nvSpPr>
         <p:spPr>
           <a:xfrm>
-            <a:off x="438912" y="4466844"/>
-            <a:ext cx="50292" cy="141732"/>
+            <a:off x="448056" y="4466844"/>
+            <a:ext cx="45720" cy="141732"/>
           </a:xfrm>
           <a:prstGeom prst="rect">
             <a:avLst/>
@@ -2036,8 +2036,8 @@
         </p:nvSpPr>
         <p:spPr>
           <a:xfrm>
-            <a:off x="548640" y="4434840"/>
-            <a:ext cx="3794760" cy="210312"/>
+            <a:off x="566928" y="4434840"/>
+            <a:ext cx="3776472" cy="210312"/>
           </a:xfrm>
           <a:prstGeom prst="rect">
             <a:avLst/>
@@ -2075,8 +2075,8 @@
         </p:nvSpPr>
         <p:spPr>
           <a:xfrm>
-            <a:off x="557784" y="4674413"/>
-            <a:ext cx="141732" cy="141732"/>
+            <a:off x="566928" y="4675327"/>
+            <a:ext cx="138989" cy="138989"/>
           </a:xfrm>
           <a:prstGeom prst="ellipse">
             <a:avLst/>
@@ -2100,8 +2100,8 @@
         </p:nvSpPr>
         <p:spPr>
           <a:xfrm>
-            <a:off x="557784" y="4674413"/>
-            <a:ext cx="141732" cy="141732"/>
+            <a:off x="566928" y="4675327"/>
+            <a:ext cx="138989" cy="138989"/>
           </a:xfrm>
           <a:prstGeom prst="rect">
             <a:avLst/>
@@ -2139,8 +2139,8 @@
         </p:nvSpPr>
         <p:spPr>
           <a:xfrm>
-            <a:off x="749808" y="4663440"/>
-            <a:ext cx="3538728" cy="164592"/>
+            <a:off x="768096" y="4663440"/>
+            <a:ext cx="3447288" cy="162763"/>
           </a:xfrm>
           <a:prstGeom prst="rect">
             <a:avLst/>
@@ -2178,8 +2178,8 @@
         </p:nvSpPr>
         <p:spPr>
           <a:xfrm>
-            <a:off x="557784" y="4844491"/>
-            <a:ext cx="141732" cy="141732"/>
+            <a:off x="566928" y="4845406"/>
+            <a:ext cx="138989" cy="138989"/>
           </a:xfrm>
           <a:prstGeom prst="ellipse">
             <a:avLst/>
@@ -2203,8 +2203,8 @@
         </p:nvSpPr>
         <p:spPr>
           <a:xfrm>
-            <a:off x="557784" y="4844491"/>
-            <a:ext cx="141732" cy="141732"/>
+            <a:off x="566928" y="4845406"/>
+            <a:ext cx="138989" cy="138989"/>
           </a:xfrm>
           <a:prstGeom prst="rect">
             <a:avLst/>
@@ -2242,8 +2242,8 @@
         </p:nvSpPr>
         <p:spPr>
           <a:xfrm>
-            <a:off x="749808" y="4833518"/>
-            <a:ext cx="3538728" cy="164592"/>
+            <a:off x="768096" y="4833518"/>
+            <a:ext cx="3447288" cy="162763"/>
           </a:xfrm>
           <a:prstGeom prst="rect">
             <a:avLst/>
@@ -2281,8 +2281,8 @@
         </p:nvSpPr>
         <p:spPr>
           <a:xfrm>
-            <a:off x="557784" y="5014570"/>
-            <a:ext cx="141732" cy="141732"/>
+            <a:off x="566928" y="5015484"/>
+            <a:ext cx="138989" cy="138989"/>
           </a:xfrm>
           <a:prstGeom prst="ellipse">
             <a:avLst/>
@@ -2306,8 +2306,8 @@
         </p:nvSpPr>
         <p:spPr>
           <a:xfrm>
-            <a:off x="557784" y="5014570"/>
-            <a:ext cx="141732" cy="141732"/>
+            <a:off x="566928" y="5015484"/>
+            <a:ext cx="138989" cy="138989"/>
           </a:xfrm>
           <a:prstGeom prst="rect">
             <a:avLst/>
@@ -2345,8 +2345,8 @@
         </p:nvSpPr>
         <p:spPr>
           <a:xfrm>
-            <a:off x="749808" y="5003597"/>
-            <a:ext cx="3538728" cy="164592"/>
+            <a:off x="768096" y="5003597"/>
+            <a:ext cx="3447288" cy="162763"/>
           </a:xfrm>
           <a:prstGeom prst="rect">
             <a:avLst/>
@@ -2384,8 +2384,8 @@
         </p:nvSpPr>
         <p:spPr>
           <a:xfrm>
-            <a:off x="557784" y="5184648"/>
-            <a:ext cx="141732" cy="141732"/>
+            <a:off x="566928" y="5185562"/>
+            <a:ext cx="138989" cy="138989"/>
           </a:xfrm>
           <a:prstGeom prst="ellipse">
             <a:avLst/>
@@ -2409,8 +2409,8 @@
         </p:nvSpPr>
         <p:spPr>
           <a:xfrm>
-            <a:off x="557784" y="5184648"/>
-            <a:ext cx="141732" cy="141732"/>
+            <a:off x="566928" y="5185562"/>
+            <a:ext cx="138989" cy="138989"/>
           </a:xfrm>
           <a:prstGeom prst="rect">
             <a:avLst/>
@@ -2448,8 +2448,8 @@
         </p:nvSpPr>
         <p:spPr>
           <a:xfrm>
-            <a:off x="749808" y="5173675"/>
-            <a:ext cx="3538728" cy="164592"/>
+            <a:off x="768096" y="5173675"/>
+            <a:ext cx="3447288" cy="162763"/>
           </a:xfrm>
           <a:prstGeom prst="rect">
             <a:avLst/>
@@ -2487,8 +2487,8 @@
         </p:nvSpPr>
         <p:spPr>
           <a:xfrm>
-            <a:off x="557784" y="5354726"/>
-            <a:ext cx="141732" cy="141732"/>
+            <a:off x="566928" y="5355641"/>
+            <a:ext cx="138989" cy="138989"/>
           </a:xfrm>
           <a:prstGeom prst="ellipse">
             <a:avLst/>
@@ -2512,8 +2512,8 @@
         </p:nvSpPr>
         <p:spPr>
           <a:xfrm>
-            <a:off x="557784" y="5354726"/>
-            <a:ext cx="141732" cy="141732"/>
+            <a:off x="566928" y="5355641"/>
+            <a:ext cx="138989" cy="138989"/>
           </a:xfrm>
           <a:prstGeom prst="rect">
             <a:avLst/>
@@ -2551,8 +2551,8 @@
         </p:nvSpPr>
         <p:spPr>
           <a:xfrm>
-            <a:off x="749808" y="5343754"/>
-            <a:ext cx="3538728" cy="164592"/>
+            <a:off x="768096" y="5343754"/>
+            <a:ext cx="3447288" cy="162763"/>
           </a:xfrm>
           <a:prstGeom prst="rect">
             <a:avLst/>
@@ -2590,8 +2590,8 @@
         </p:nvSpPr>
         <p:spPr>
           <a:xfrm>
-            <a:off x="438912" y="5618988"/>
-            <a:ext cx="50292" cy="141732"/>
+            <a:off x="448056" y="5618988"/>
+            <a:ext cx="45720" cy="141732"/>
           </a:xfrm>
           <a:prstGeom prst="rect">
             <a:avLst/>
@@ -2615,8 +2615,8 @@
         </p:nvSpPr>
         <p:spPr>
           <a:xfrm>
-            <a:off x="548640" y="5586984"/>
-            <a:ext cx="3794760" cy="210312"/>
+            <a:off x="566928" y="5586984"/>
+            <a:ext cx="3776472" cy="210312"/>
           </a:xfrm>
           <a:prstGeom prst="rect">
             <a:avLst/>
@@ -2654,8 +2654,8 @@
         </p:nvSpPr>
         <p:spPr>
           <a:xfrm>
-            <a:off x="548640" y="5815584"/>
-            <a:ext cx="1796796" cy="214884"/>
+            <a:off x="566928" y="5815584"/>
+            <a:ext cx="1778508" cy="214884"/>
           </a:xfrm>
           <a:prstGeom prst="roundRect">
             <a:avLst>
@@ -2681,8 +2681,8 @@
         </p:nvSpPr>
         <p:spPr>
           <a:xfrm>
-            <a:off x="585216" y="5815584"/>
-            <a:ext cx="1723644" cy="214884"/>
+            <a:off x="603504" y="5815584"/>
+            <a:ext cx="1705356" cy="214884"/>
           </a:xfrm>
           <a:prstGeom prst="rect">
             <a:avLst/>
@@ -2721,7 +2721,7 @@
         <p:spPr>
           <a:xfrm>
             <a:off x="2436876" y="5815584"/>
-            <a:ext cx="1796796" cy="214884"/>
+            <a:ext cx="1778508" cy="214884"/>
           </a:xfrm>
           <a:prstGeom prst="roundRect">
             <a:avLst>
@@ -2748,7 +2748,7 @@
         <p:spPr>
           <a:xfrm>
             <a:off x="2473452" y="5815584"/>
-            <a:ext cx="1723644" cy="214884"/>
+            <a:ext cx="1705356" cy="214884"/>
           </a:xfrm>
           <a:prstGeom prst="rect">
             <a:avLst/>
@@ -2786,8 +2786,8 @@
         </p:nvSpPr>
         <p:spPr>
           <a:xfrm>
-            <a:off x="548640" y="6048756"/>
-            <a:ext cx="1796796" cy="214884"/>
+            <a:off x="566928" y="6048756"/>
+            <a:ext cx="1778508" cy="214884"/>
           </a:xfrm>
           <a:prstGeom prst="roundRect">
             <a:avLst>
@@ -2813,8 +2813,8 @@
         </p:nvSpPr>
         <p:spPr>
           <a:xfrm>
-            <a:off x="585216" y="6048756"/>
-            <a:ext cx="1723644" cy="214884"/>
+            <a:off x="603504" y="6048756"/>
+            <a:ext cx="1705356" cy="214884"/>
           </a:xfrm>
           <a:prstGeom prst="rect">
             <a:avLst/>
@@ -2853,7 +2853,7 @@
         <p:spPr>
           <a:xfrm>
             <a:off x="2436876" y="6048756"/>
-            <a:ext cx="1796796" cy="214884"/>
+            <a:ext cx="1778508" cy="214884"/>
           </a:xfrm>
           <a:prstGeom prst="roundRect">
             <a:avLst>
@@ -2880,7 +2880,7 @@
         <p:spPr>
           <a:xfrm>
             <a:off x="2473452" y="6048756"/>
-            <a:ext cx="1723644" cy="214884"/>
+            <a:ext cx="1705356" cy="214884"/>
           </a:xfrm>
           <a:prstGeom prst="rect">
             <a:avLst/>
@@ -2918,8 +2918,8 @@
         </p:nvSpPr>
         <p:spPr>
           <a:xfrm>
-            <a:off x="548640" y="6281928"/>
-            <a:ext cx="1796796" cy="214884"/>
+            <a:off x="566928" y="6281928"/>
+            <a:ext cx="1778508" cy="214884"/>
           </a:xfrm>
           <a:prstGeom prst="roundRect">
             <a:avLst>
@@ -2945,8 +2945,8 @@
         </p:nvSpPr>
         <p:spPr>
           <a:xfrm>
-            <a:off x="585216" y="6281928"/>
-            <a:ext cx="1723644" cy="214884"/>
+            <a:off x="603504" y="6281928"/>
+            <a:ext cx="1705356" cy="214884"/>
           </a:xfrm>
           <a:prstGeom prst="rect">
             <a:avLst/>
@@ -2985,7 +2985,7 @@
         <p:spPr>
           <a:xfrm>
             <a:off x="2436876" y="6281928"/>
-            <a:ext cx="1796796" cy="214884"/>
+            <a:ext cx="1778508" cy="214884"/>
           </a:xfrm>
           <a:prstGeom prst="roundRect">
             <a:avLst>
@@ -3012,7 +3012,7 @@
         <p:spPr>
           <a:xfrm>
             <a:off x="2473452" y="6281928"/>
-            <a:ext cx="1723644" cy="214884"/>
+            <a:ext cx="1705356" cy="214884"/>
           </a:xfrm>
           <a:prstGeom prst="rect">
             <a:avLst/>
@@ -3139,8 +3139,8 @@
         </p:nvSpPr>
         <p:spPr>
           <a:xfrm>
-            <a:off x="5349240" y="3172968"/>
-            <a:ext cx="3392424" cy="749808"/>
+            <a:off x="5349240" y="3255264"/>
+            <a:ext cx="457200" cy="196596"/>
           </a:xfrm>
           <a:prstGeom prst="rect">
             <a:avLst/>
@@ -3153,13 +3153,10 @@
           <a:lstStyle/>
           <a:p>
             <a:pPr indent="0" marL="0">
-              <a:lnSpc>
-                <a:spcPct val="110000"/>
-              </a:lnSpc>
-              <a:buNone/>
-            </a:pPr>
-            <a:r>
-              <a:rPr lang="en-US" sz="780" b="1" dirty="0">
+              <a:buNone/>
+            </a:pPr>
+            <a:r>
+              <a:rPr lang="en-US" sz="800" b="1" dirty="0">
                 <a:solidFill>
                   <a:srgbClr val="1F3864"/>
                 </a:solidFill>
@@ -3167,16 +3164,38 @@
                 <a:ea typeface="맑은 고딕" pitchFamily="34" charset="-122"/>
                 <a:cs typeface="맑은 고딕" pitchFamily="34" charset="-120"/>
               </a:rPr>
-              <a:t>최신성 : </a:t>
-            </a:r>
+              <a:t>최신성 :</a:t>
+            </a:r>
+            <a:endParaRPr lang="en-US" sz="800" dirty="0"/>
+          </a:p>
+        </p:txBody>
+      </p:sp>
+      <p:sp>
+        <p:nvSpPr>
+          <p:cNvPr id="69" name="Text 67"/>
+          <p:cNvSpPr/>
+          <p:nvPr/>
+        </p:nvSpPr>
+        <p:spPr>
+          <a:xfrm>
+            <a:off x="5824728" y="3255264"/>
+            <a:ext cx="2935224" cy="196596"/>
+          </a:xfrm>
+          <a:prstGeom prst="rect">
+            <a:avLst/>
+          </a:prstGeom>
+          <a:noFill/>
+          <a:ln/>
+        </p:spPr>
+        <p:txBody>
+          <a:bodyPr wrap="square" lIns="0" tIns="0" rIns="0" bIns="0" rtlCol="0" anchor="ctr"/>
+          <a:lstStyle/>
+          <a:p>
             <a:pPr indent="0" marL="0">
-              <a:lnSpc>
-                <a:spcPct val="110000"/>
-              </a:lnSpc>
-              <a:buNone/>
-            </a:pPr>
-            <a:r>
-              <a:rPr lang="en-US" sz="780" dirty="0">
+              <a:buNone/>
+            </a:pPr>
+            <a:r>
+              <a:rPr lang="en-US" sz="800" dirty="0">
                 <a:solidFill>
                   <a:srgbClr val="222222"/>
                 </a:solidFill>
@@ -3184,19 +3203,38 @@
                 <a:ea typeface="맑은 고딕" pitchFamily="34" charset="-122"/>
                 <a:cs typeface="맑은 고딕" pitchFamily="34" charset="-120"/>
               </a:rPr>
-              <a:t>수작업 개입 없이 일 단위 자동 갱신되어 교육자료 노후화 문제 해소</a:t>
-            </a:r>
-            <a:endParaRPr lang="en-US" sz="780" dirty="0"/>
-          </a:p>
+              <a:t>수작업 개입 없이 일 단위 자동 갱신, 교육자료 노후화 문제 해소</a:t>
+            </a:r>
+            <a:endParaRPr lang="en-US" sz="800" dirty="0"/>
+          </a:p>
+        </p:txBody>
+      </p:sp>
+      <p:sp>
+        <p:nvSpPr>
+          <p:cNvPr id="70" name="Text 68"/>
+          <p:cNvSpPr/>
+          <p:nvPr/>
+        </p:nvSpPr>
+        <p:spPr>
+          <a:xfrm>
+            <a:off x="5349240" y="3451860"/>
+            <a:ext cx="457200" cy="196596"/>
+          </a:xfrm>
+          <a:prstGeom prst="rect">
+            <a:avLst/>
+          </a:prstGeom>
+          <a:noFill/>
+          <a:ln/>
+        </p:spPr>
+        <p:txBody>
+          <a:bodyPr wrap="square" lIns="0" tIns="0" rIns="0" bIns="0" rtlCol="0" anchor="ctr"/>
+          <a:lstStyle/>
           <a:p>
             <a:pPr indent="0" marL="0">
-              <a:lnSpc>
-                <a:spcPct val="110000"/>
-              </a:lnSpc>
-              <a:buNone/>
-            </a:pPr>
-            <a:r>
-              <a:rPr lang="en-US" sz="780" b="1" dirty="0">
+              <a:buNone/>
+            </a:pPr>
+            <a:r>
+              <a:rPr lang="en-US" sz="800" b="1" dirty="0">
                 <a:solidFill>
                   <a:srgbClr val="1F3864"/>
                 </a:solidFill>
@@ -3204,16 +3242,38 @@
                 <a:ea typeface="맑은 고딕" pitchFamily="34" charset="-122"/>
                 <a:cs typeface="맑은 고딕" pitchFamily="34" charset="-120"/>
               </a:rPr>
-              <a:t>접근성 : </a:t>
-            </a:r>
+              <a:t>접근성 :</a:t>
+            </a:r>
+            <a:endParaRPr lang="en-US" sz="800" dirty="0"/>
+          </a:p>
+        </p:txBody>
+      </p:sp>
+      <p:sp>
+        <p:nvSpPr>
+          <p:cNvPr id="71" name="Text 69"/>
+          <p:cNvSpPr/>
+          <p:nvPr/>
+        </p:nvSpPr>
+        <p:spPr>
+          <a:xfrm>
+            <a:off x="5824728" y="3451860"/>
+            <a:ext cx="2935224" cy="196596"/>
+          </a:xfrm>
+          <a:prstGeom prst="rect">
+            <a:avLst/>
+          </a:prstGeom>
+          <a:noFill/>
+          <a:ln/>
+        </p:spPr>
+        <p:txBody>
+          <a:bodyPr wrap="square" lIns="0" tIns="0" rIns="0" bIns="0" rtlCol="0" anchor="ctr"/>
+          <a:lstStyle/>
+          <a:p>
             <a:pPr indent="0" marL="0">
-              <a:lnSpc>
-                <a:spcPct val="110000"/>
-              </a:lnSpc>
-              <a:buNone/>
-            </a:pPr>
-            <a:r>
-              <a:rPr lang="en-US" sz="780" dirty="0">
+              <a:buNone/>
+            </a:pPr>
+            <a:r>
+              <a:rPr lang="en-US" sz="800" dirty="0">
                 <a:solidFill>
                   <a:srgbClr val="222222"/>
                 </a:solidFill>
@@ -3221,19 +3281,38 @@
                 <a:ea typeface="맑은 고딕" pitchFamily="34" charset="-122"/>
                 <a:cs typeface="맑은 고딕" pitchFamily="34" charset="-120"/>
               </a:rPr>
-              <a:t>윈도우·웹/앱 환경 기준으로 재정렬하여 비개발 직군의 직접 활용 가능</a:t>
-            </a:r>
-            <a:endParaRPr lang="en-US" sz="780" dirty="0"/>
-          </a:p>
+              <a:t>윈도우·웹/앱 환경 기준으로 재정렬, 비개발 직군도 직접 활용 가능</a:t>
+            </a:r>
+            <a:endParaRPr lang="en-US" sz="800" dirty="0"/>
+          </a:p>
+        </p:txBody>
+      </p:sp>
+      <p:sp>
+        <p:nvSpPr>
+          <p:cNvPr id="72" name="Text 70"/>
+          <p:cNvSpPr/>
+          <p:nvPr/>
+        </p:nvSpPr>
+        <p:spPr>
+          <a:xfrm>
+            <a:off x="5349240" y="3648456"/>
+            <a:ext cx="457200" cy="196596"/>
+          </a:xfrm>
+          <a:prstGeom prst="rect">
+            <a:avLst/>
+          </a:prstGeom>
+          <a:noFill/>
+          <a:ln/>
+        </p:spPr>
+        <p:txBody>
+          <a:bodyPr wrap="square" lIns="0" tIns="0" rIns="0" bIns="0" rtlCol="0" anchor="ctr"/>
+          <a:lstStyle/>
           <a:p>
             <a:pPr indent="0" marL="0">
-              <a:lnSpc>
-                <a:spcPct val="110000"/>
-              </a:lnSpc>
-              <a:buNone/>
-            </a:pPr>
-            <a:r>
-              <a:rPr lang="en-US" sz="780" b="1" dirty="0">
+              <a:buNone/>
+            </a:pPr>
+            <a:r>
+              <a:rPr lang="en-US" sz="800" b="1" dirty="0">
                 <a:solidFill>
                   <a:srgbClr val="1F3864"/>
                 </a:solidFill>
@@ -3241,16 +3320,38 @@
                 <a:ea typeface="맑은 고딕" pitchFamily="34" charset="-122"/>
                 <a:cs typeface="맑은 고딕" pitchFamily="34" charset="-120"/>
               </a:rPr>
-              <a:t>일관성 : </a:t>
-            </a:r>
+              <a:t>일관성 :</a:t>
+            </a:r>
+            <a:endParaRPr lang="en-US" sz="800" dirty="0"/>
+          </a:p>
+        </p:txBody>
+      </p:sp>
+      <p:sp>
+        <p:nvSpPr>
+          <p:cNvPr id="73" name="Text 71"/>
+          <p:cNvSpPr/>
+          <p:nvPr/>
+        </p:nvSpPr>
+        <p:spPr>
+          <a:xfrm>
+            <a:off x="5824728" y="3648456"/>
+            <a:ext cx="2935224" cy="196596"/>
+          </a:xfrm>
+          <a:prstGeom prst="rect">
+            <a:avLst/>
+          </a:prstGeom>
+          <a:noFill/>
+          <a:ln/>
+        </p:spPr>
+        <p:txBody>
+          <a:bodyPr wrap="square" lIns="0" tIns="0" rIns="0" bIns="0" rtlCol="0" anchor="ctr"/>
+          <a:lstStyle/>
+          <a:p>
             <a:pPr indent="0" marL="0">
-              <a:lnSpc>
-                <a:spcPct val="110000"/>
-              </a:lnSpc>
-              <a:buNone/>
-            </a:pPr>
-            <a:r>
-              <a:rPr lang="en-US" sz="780" dirty="0">
+              <a:buNone/>
+            </a:pPr>
+            <a:r>
+              <a:rPr lang="en-US" sz="800" dirty="0">
                 <a:solidFill>
                   <a:srgbClr val="222222"/>
                 </a:solidFill>
@@ -3260,20 +3361,20 @@
               </a:rPr>
               <a:t>품질의 정량 관리로 담당자 변경 시에도 산출물 수준 유지</a:t>
             </a:r>
-            <a:endParaRPr lang="en-US" sz="780" dirty="0"/>
-          </a:p>
-        </p:txBody>
-      </p:sp>
-      <p:sp>
-        <p:nvSpPr>
-          <p:cNvPr id="69" name="Shape 67"/>
-          <p:cNvSpPr/>
-          <p:nvPr/>
-        </p:nvSpPr>
-        <p:spPr>
-          <a:xfrm>
-            <a:off x="4745736" y="4018788"/>
-            <a:ext cx="1847088" cy="1030550"/>
+            <a:endParaRPr lang="en-US" sz="800" dirty="0"/>
+          </a:p>
+        </p:txBody>
+      </p:sp>
+      <p:sp>
+        <p:nvSpPr>
+          <p:cNvPr id="74" name="Shape 72"/>
+          <p:cNvSpPr/>
+          <p:nvPr/>
+        </p:nvSpPr>
+        <p:spPr>
+          <a:xfrm>
+            <a:off x="4677156" y="4018788"/>
+            <a:ext cx="1915668" cy="1068356"/>
           </a:xfrm>
           <a:prstGeom prst="rect">
             <a:avLst/>
@@ -3291,7 +3392,7 @@
       </p:sp>
       <p:pic>
         <p:nvPicPr>
-          <p:cNvPr id="70" name="Image 0" descr="/tmp/t_updates.png">    </p:cNvPr>
+          <p:cNvPr id="75" name="Image 0" descr="/tmp/t_updates.png">    </p:cNvPr>
           <p:cNvPicPr>
             <a:picLocks noChangeAspect="1"/>
           </p:cNvPicPr>
@@ -3305,8 +3406,8 @@
         </p:blipFill>
         <p:spPr>
           <a:xfrm>
-            <a:off x="4759452" y="4032504"/>
-            <a:ext cx="1819656" cy="1003118"/>
+            <a:off x="4690872" y="4032504"/>
+            <a:ext cx="1888236" cy="1040924"/>
           </a:xfrm>
           <a:prstGeom prst="rect">
             <a:avLst/>
@@ -3315,14 +3416,14 @@
       </p:pic>
       <p:sp>
         <p:nvSpPr>
-          <p:cNvPr id="71" name="Text 68"/>
-          <p:cNvSpPr/>
-          <p:nvPr/>
-        </p:nvSpPr>
-        <p:spPr>
-          <a:xfrm>
-            <a:off x="4704588" y="5053910"/>
-            <a:ext cx="1929384" cy="155448"/>
+          <p:cNvPr id="76" name="Text 73"/>
+          <p:cNvSpPr/>
+          <p:nvPr/>
+        </p:nvSpPr>
+        <p:spPr>
+          <a:xfrm>
+            <a:off x="4636008" y="5091716"/>
+            <a:ext cx="1997964" cy="155448"/>
           </a:xfrm>
           <a:prstGeom prst="rect">
             <a:avLst/>
@@ -3354,14 +3455,14 @@
       </p:sp>
       <p:sp>
         <p:nvSpPr>
-          <p:cNvPr id="72" name="Shape 69"/>
+          <p:cNvPr id="77" name="Shape 74"/>
           <p:cNvSpPr/>
           <p:nvPr/>
         </p:nvSpPr>
         <p:spPr>
           <a:xfrm>
             <a:off x="6931152" y="4018788"/>
-            <a:ext cx="1847088" cy="1030550"/>
+            <a:ext cx="1915668" cy="1068356"/>
           </a:xfrm>
           <a:prstGeom prst="rect">
             <a:avLst/>
@@ -3379,7 +3480,7 @@
       </p:sp>
       <p:pic>
         <p:nvPicPr>
-          <p:cNvPr id="73" name="Image 1" descr="/tmp/t_report.png">    </p:cNvPr>
+          <p:cNvPr id="78" name="Image 1" descr="/tmp/t_report.png">    </p:cNvPr>
           <p:cNvPicPr>
             <a:picLocks noChangeAspect="1"/>
           </p:cNvPicPr>
@@ -3394,7 +3495,7 @@
         <p:spPr>
           <a:xfrm>
             <a:off x="6944868" y="4032504"/>
-            <a:ext cx="1819656" cy="1003118"/>
+            <a:ext cx="1888236" cy="1040924"/>
           </a:xfrm>
           <a:prstGeom prst="rect">
             <a:avLst/>
@@ -3403,14 +3504,14 @@
       </p:pic>
       <p:sp>
         <p:nvSpPr>
-          <p:cNvPr id="74" name="Text 70"/>
-          <p:cNvSpPr/>
-          <p:nvPr/>
-        </p:nvSpPr>
-        <p:spPr>
-          <a:xfrm>
-            <a:off x="6890004" y="5053910"/>
-            <a:ext cx="1929384" cy="155448"/>
+          <p:cNvPr id="79" name="Text 75"/>
+          <p:cNvSpPr/>
+          <p:nvPr/>
+        </p:nvSpPr>
+        <p:spPr>
+          <a:xfrm>
+            <a:off x="6890004" y="5091716"/>
+            <a:ext cx="1997964" cy="155448"/>
           </a:xfrm>
           <a:prstGeom prst="rect">
             <a:avLst/>
@@ -3442,14 +3543,14 @@
       </p:sp>
       <p:sp>
         <p:nvSpPr>
-          <p:cNvPr id="75" name="Shape 71"/>
-          <p:cNvSpPr/>
-          <p:nvPr/>
-        </p:nvSpPr>
-        <p:spPr>
-          <a:xfrm>
-            <a:off x="6931152" y="5314514"/>
-            <a:ext cx="1847088" cy="1030550"/>
+          <p:cNvPr id="80" name="Shape 76"/>
+          <p:cNvSpPr/>
+          <p:nvPr/>
+        </p:nvSpPr>
+        <p:spPr>
+          <a:xfrm>
+            <a:off x="6931152" y="5352320"/>
+            <a:ext cx="1915668" cy="1068356"/>
           </a:xfrm>
           <a:prstGeom prst="rect">
             <a:avLst/>
@@ -3467,7 +3568,7 @@
       </p:sp>
       <p:pic>
         <p:nvPicPr>
-          <p:cNvPr id="76" name="Image 2" descr="/tmp/t_section.png">    </p:cNvPr>
+          <p:cNvPr id="81" name="Image 2" descr="/tmp/t_section.png">    </p:cNvPr>
           <p:cNvPicPr>
             <a:picLocks noChangeAspect="1"/>
           </p:cNvPicPr>
@@ -3481,8 +3582,8 @@
         </p:blipFill>
         <p:spPr>
           <a:xfrm>
-            <a:off x="6944868" y="5328230"/>
-            <a:ext cx="1819656" cy="1003118"/>
+            <a:off x="6944868" y="5366036"/>
+            <a:ext cx="1888236" cy="1040924"/>
           </a:xfrm>
           <a:prstGeom prst="rect">
             <a:avLst/>
@@ -3491,14 +3592,14 @@
       </p:pic>
       <p:sp>
         <p:nvSpPr>
-          <p:cNvPr id="77" name="Text 72"/>
-          <p:cNvSpPr/>
-          <p:nvPr/>
-        </p:nvSpPr>
-        <p:spPr>
-          <a:xfrm>
-            <a:off x="6890004" y="6349636"/>
-            <a:ext cx="1929384" cy="155448"/>
+          <p:cNvPr id="82" name="Text 77"/>
+          <p:cNvSpPr/>
+          <p:nvPr/>
+        </p:nvSpPr>
+        <p:spPr>
+          <a:xfrm>
+            <a:off x="6890004" y="6425248"/>
+            <a:ext cx="1997964" cy="155448"/>
           </a:xfrm>
           <a:prstGeom prst="rect">
             <a:avLst/>
@@ -3530,14 +3631,14 @@
       </p:sp>
       <p:sp>
         <p:nvSpPr>
-          <p:cNvPr id="78" name="Shape 73"/>
-          <p:cNvSpPr/>
-          <p:nvPr/>
-        </p:nvSpPr>
-        <p:spPr>
-          <a:xfrm>
-            <a:off x="4745736" y="5314514"/>
-            <a:ext cx="1847088" cy="1030550"/>
+          <p:cNvPr id="83" name="Shape 78"/>
+          <p:cNvSpPr/>
+          <p:nvPr/>
+        </p:nvSpPr>
+        <p:spPr>
+          <a:xfrm>
+            <a:off x="4677156" y="5352320"/>
+            <a:ext cx="1915668" cy="1068356"/>
           </a:xfrm>
           <a:prstGeom prst="rect">
             <a:avLst/>
@@ -3555,7 +3656,7 @@
       </p:sp>
       <p:pic>
         <p:nvPicPr>
-          <p:cNvPr id="79" name="Image 3" descr="/tmp/t_home.png">    </p:cNvPr>
+          <p:cNvPr id="84" name="Image 3" descr="/tmp/t_home.png">    </p:cNvPr>
           <p:cNvPicPr>
             <a:picLocks noChangeAspect="1"/>
           </p:cNvPicPr>
@@ -3569,8 +3670,8 @@
         </p:blipFill>
         <p:spPr>
           <a:xfrm>
-            <a:off x="4759452" y="5328230"/>
-            <a:ext cx="1819656" cy="1003118"/>
+            <a:off x="4690872" y="5366036"/>
+            <a:ext cx="1888236" cy="1040924"/>
           </a:xfrm>
           <a:prstGeom prst="rect">
             <a:avLst/>
@@ -3579,14 +3680,14 @@
       </p:pic>
       <p:sp>
         <p:nvSpPr>
-          <p:cNvPr id="80" name="Text 74"/>
-          <p:cNvSpPr/>
-          <p:nvPr/>
-        </p:nvSpPr>
-        <p:spPr>
-          <a:xfrm>
-            <a:off x="4704588" y="6349636"/>
-            <a:ext cx="1929384" cy="155448"/>
+          <p:cNvPr id="85" name="Text 79"/>
+          <p:cNvSpPr/>
+          <p:nvPr/>
+        </p:nvSpPr>
+        <p:spPr>
+          <a:xfrm>
+            <a:off x="4636008" y="6425248"/>
+            <a:ext cx="1997964" cy="155448"/>
           </a:xfrm>
           <a:prstGeom prst="rect">
             <a:avLst/>
@@ -3618,13 +3719,13 @@
       </p:sp>
       <p:sp>
         <p:nvSpPr>
-          <p:cNvPr id="81" name="Shape 75"/>
-          <p:cNvSpPr/>
-          <p:nvPr/>
-        </p:nvSpPr>
-        <p:spPr>
-          <a:xfrm>
-            <a:off x="6620256" y="4460911"/>
+          <p:cNvPr id="86" name="Shape 80"/>
+          <p:cNvSpPr/>
+          <p:nvPr/>
+        </p:nvSpPr>
+        <p:spPr>
+          <a:xfrm>
+            <a:off x="6620256" y="4479814"/>
             <a:ext cx="283464" cy="146304"/>
           </a:xfrm>
           <a:prstGeom prst="rightArrow">
@@ -3643,13 +3744,13 @@
       </p:sp>
       <p:sp>
         <p:nvSpPr>
-          <p:cNvPr id="82" name="Shape 76"/>
-          <p:cNvSpPr/>
-          <p:nvPr/>
-        </p:nvSpPr>
-        <p:spPr>
-          <a:xfrm>
-            <a:off x="6620256" y="5756637"/>
+          <p:cNvPr id="87" name="Shape 81"/>
+          <p:cNvSpPr/>
+          <p:nvPr/>
+        </p:nvSpPr>
+        <p:spPr>
+          <a:xfrm>
+            <a:off x="6620256" y="5813346"/>
             <a:ext cx="283464" cy="146304"/>
           </a:xfrm>
           <a:prstGeom prst="leftArrow">
@@ -3668,13 +3769,13 @@
       </p:sp>
       <p:sp>
         <p:nvSpPr>
-          <p:cNvPr id="83" name="Shape 77"/>
-          <p:cNvSpPr/>
-          <p:nvPr/>
-        </p:nvSpPr>
-        <p:spPr>
-          <a:xfrm>
-            <a:off x="7754112" y="5204786"/>
+          <p:cNvPr id="88" name="Shape 82"/>
+          <p:cNvSpPr/>
+          <p:nvPr/>
+        </p:nvSpPr>
+        <p:spPr>
+          <a:xfrm>
+            <a:off x="7788402" y="5242592"/>
             <a:ext cx="201168" cy="118872"/>
           </a:xfrm>
           <a:prstGeom prst="downArrow">
@@ -3693,7 +3794,7 @@
       </p:sp>
       <p:sp>
         <p:nvSpPr>
-          <p:cNvPr id="84" name="Shape 78"/>
+          <p:cNvPr id="89" name="Shape 83"/>
           <p:cNvSpPr/>
           <p:nvPr/>
         </p:nvSpPr>
@@ -3718,7 +3819,7 @@
       </p:sp>
       <p:sp>
         <p:nvSpPr>
-          <p:cNvPr id="85" name="Text 79"/>
+          <p:cNvPr id="90" name="Text 84"/>
           <p:cNvSpPr/>
           <p:nvPr/>
         </p:nvSpPr>
@@ -3757,7 +3858,7 @@
       </p:sp>
       <p:sp>
         <p:nvSpPr>
-          <p:cNvPr id="86" name="Text 80"/>
+          <p:cNvPr id="91" name="Text 85"/>
           <p:cNvSpPr/>
           <p:nvPr/>
         </p:nvSpPr>
